--- a/entregables/presentacion_fase5.pptx
+++ b/entregables/presentacion_fase5.pptx
@@ -514,7 +514,7 @@
           <a:p>
             <a:r>
               <a:rPr lang="en-US" dirty="0"/>
-              <a:t>Bienvenida. Marco: caso de portafolio que simula el trabajo de un analista de datos para un fondo de inversión evaluando el sector de videojuegos. Duración total prevista: ~30 minutos.</a:t>
+              <a:t>Welcome. Framing: a portfolio case that simulates the work of a data analyst for an investment fund evaluating the video game sector. Expected total duration: ~30 minutes.</a:t>
             </a:r>
             <a:endParaRPr lang="en-US" dirty="0"/>
           </a:p>
@@ -602,7 +602,7 @@
           <a:p>
             <a:r>
               <a:rPr lang="en-US" dirty="0"/>
-              <a:t>Dejar claro a la audiencia que la decision de inversion formal no se toma en esta reunion, sino que esta es la evidencia que la sustentara.</a:t>
+              <a:t>Make clear to the audience that the formal investment decision is not being made in this meeting — this is the evidence that will support it.</a:t>
             </a:r>
             <a:endParaRPr lang="en-US" dirty="0"/>
           </a:p>
@@ -690,7 +690,7 @@
           <a:p>
             <a:r>
               <a:rPr lang="en-US" dirty="0"/>
-              <a:t>Anexo para el analista senior / audiencia tecnica que quiera auditar el metodo.</a:t>
+              <a:t>Appendix for the senior analyst / technical audience who wants to audit the method.</a:t>
             </a:r>
             <a:endParaRPr lang="en-US" dirty="0"/>
           </a:p>
@@ -778,7 +778,7 @@
           <a:p>
             <a:r>
               <a:rPr lang="en-US" dirty="0"/>
-              <a:t>Las cinco preguntas mas incomodas, preparadas por escrito, siguiendo la puerta de salida de la fase 5.</a:t>
+              <a:t>The five toughest questions, prepared in writing, following Phase 5's exit gate.</a:t>
             </a:r>
             <a:endParaRPr lang="en-US" dirty="0"/>
           </a:p>
@@ -866,7 +866,7 @@
           <a:p>
             <a:r>
               <a:rPr lang="en-US" dirty="0"/>
-              <a:t>Cierre. Abrir espacio de preguntas usando el anexo de Q&amp;A preparado.</a:t>
+              <a:t>Close. Open the floor for questions using the prepared Q&amp;A appendix.</a:t>
             </a:r>
             <a:endParaRPr lang="en-US" dirty="0"/>
           </a:p>
@@ -954,7 +954,7 @@
           <a:p>
             <a:r>
               <a:rPr lang="en-US" dirty="0"/>
-              <a:t>Cliente ficticio: fondo de inversión. Steam como proxy del mercado de PC/digital. La pregunta fue definida y aprobada en la fase 1 (Preguntar) del caso.</a:t>
+              <a:t>Fictional client: investment fund. Steam as a proxy for the PC/digital market. The question was defined and approved in Phase 1 (Ask) of the case.</a:t>
             </a:r>
             <a:endParaRPr lang="en-US" dirty="0"/>
           </a:p>
@@ -1042,7 +1042,7 @@
           <a:p>
             <a:r>
               <a:rPr lang="en-US" dirty="0"/>
-              <a:t>Este es un resumen; el detalle técnico completo (ROCCC, sesgos, bitácora de limpieza) está en el notebook y en CASO.md. Para esta audiencia (comité de inversión) se muestra solo lo esencial.</a:t>
+              <a:t>This is a summary; the full technical detail (ROCCC, biases, cleaning log) is in the notebook and in CASO.md. For this audience (investment committee) only the essentials are shown.</a:t>
             </a:r>
             <a:endParaRPr lang="en-US" dirty="0"/>
           </a:p>
@@ -1130,7 +1130,7 @@
           <a:p>
             <a:r>
               <a:rPr lang="en-US" dirty="0"/>
-              <a:t>Filtro de tres partes: la pregunta practica es que franja de precio conviene por genero; los datos muestran Q1 sistematicamente mas bajo; el grafico lo confirma visualmente barra por barra.</a:t>
+              <a:t>Three-part filter: the practical question is which price band suits each genre; the data shows Q1 is systematically lowest; the chart confirms it visually, bar by bar.</a:t>
             </a:r>
             <a:endParaRPr lang="en-US" dirty="0"/>
           </a:p>
@@ -1218,7 +1218,7 @@
           <a:p>
             <a:r>
               <a:rPr lang="en-US" dirty="0"/>
-              <a:t>Recalculado por via alterna (pivot_table) y coincide con groupby.agg. Esto descarta un error de calculo detras del patron.</a:t>
+              <a:t>Recalculated via an alternate path (pivot_table) and matches groupby.agg. This rules out a calculation error behind the pattern.</a:t>
             </a:r>
             <a:endParaRPr lang="en-US" dirty="0"/>
           </a:p>
@@ -1306,7 +1306,7 @@
           <a:p>
             <a:r>
               <a:rPr lang="en-US" dirty="0"/>
-              <a:t>Massively Multiplayer queda fuera: peor recepcion en las 4 franjas y solo 176 juegos de evidencia.</a:t>
+              <a:t>Massively Multiplayer is left out: worst reception across all 4 bands and only 176 games of evidence.</a:t>
             </a:r>
             <a:endParaRPr lang="en-US" dirty="0"/>
           </a:p>
@@ -1394,7 +1394,7 @@
           <a:p>
             <a:r>
               <a:rPr lang="en-US" dirty="0"/>
-              <a:t>Esta es la verificacion clave contra la interpretacion alternativa mas obvia: que los juegos baratos simplemente llevan mas tiempo en el mercado y acumularon mas resenas negativas por eso.</a:t>
+              <a:t>This is the key check against the most obvious alternative interpretation: that cheap games have simply been on the market longer and accumulated more negative reviews because of that.</a:t>
             </a:r>
             <a:endParaRPr lang="en-US" dirty="0"/>
           </a:p>
@@ -1482,7 +1482,7 @@
           <a:p>
             <a:r>
               <a:rPr lang="en-US" dirty="0"/>
-              <a:t>Estos tres son insumo para las recomendaciones formales de la fase 6 (Actuar), aun no cerradas — aqui se presenta la evidencia, no la decision final de inversion.</a:t>
+              <a:t>These three feed into the formal recommendations of Phase 6 (Act), not yet closed — this presents the evidence, not the final investment decision.</a:t>
             </a:r>
             <a:endParaRPr lang="en-US" dirty="0"/>
           </a:p>
@@ -1570,7 +1570,7 @@
           <a:p>
             <a:r>
               <a:rPr lang="en-US" dirty="0"/>
-              <a:t>Estas limitaciones estan escritas explicitamente, no escondidas en un anexo, siguiendo la puerta de salida de la fase 5.</a:t>
+              <a:t>These limitations are stated explicitly, not hidden in an appendix, following Phase 5's exit gate.</a:t>
             </a:r>
             <a:endParaRPr lang="en-US" dirty="0"/>
           </a:p>
@@ -1976,7 +1976,7 @@
                 <a:ea typeface="Calibri" pitchFamily="34" charset="-122"/>
                 <a:cs typeface="Calibri" pitchFamily="34" charset="-120"/>
               </a:rPr>
-              <a:t>Precio y recepción en Steam</a:t>
+              <a:t>Price and reception on Steam</a:t>
             </a:r>
             <a:endParaRPr lang="en-US" sz="2400" dirty="0"/>
           </a:p>
@@ -2015,7 +2015,7 @@
                 <a:ea typeface="Cambria" pitchFamily="34" charset="-122"/>
                 <a:cs typeface="Cambria" pitchFamily="34" charset="-120"/>
               </a:rPr>
-              <a:t>¿En qué géneros debería un fondo de inversión priorizar su due diligence?</a:t>
+              <a:t>Which genres should an investment fund prioritise for due diligence?</a:t>
             </a:r>
             <a:endParaRPr lang="en-US" sz="3800" dirty="0"/>
           </a:p>
@@ -2054,7 +2054,7 @@
                 <a:ea typeface="Calibri" pitchFamily="34" charset="-122"/>
                 <a:cs typeface="Calibri" pitchFamily="34" charset="-120"/>
               </a:rPr>
-              <a:t>Caso de estudio de portafolio — Analista de Datos  ·  28 de julio de 2026</a:t>
+              <a:t>Portfolio case study — Data Analyst  ·  July 28, 2026</a:t>
             </a:r>
             <a:endParaRPr lang="en-US" sz="1400" dirty="0"/>
           </a:p>
@@ -2125,7 +2125,7 @@
                 <a:ea typeface="Cambria" pitchFamily="34" charset="-122"/>
                 <a:cs typeface="Cambria" pitchFamily="34" charset="-120"/>
               </a:rPr>
-              <a:t>Próximo paso: fase 6 — Actuar</a:t>
+              <a:t>Next step: Phase 6 — Act</a:t>
             </a:r>
             <a:endParaRPr lang="en-US" sz="2800" dirty="0"/>
           </a:p>
@@ -2161,7 +2161,7 @@
                   <a:srgbClr val="1A1A2E"/>
                 </a:solidFill>
               </a:rPr>
-              <a:t>Esta presentación cierra la fase de análisis y visualización (fases 4-5 del caso). La fase 6 traducirá esta evidencia en:
+              <a:t>This presentation closes the analysis and visualisation phases (Phases 4-5 of the case). Phase 6 will translate this evidence into:
 </a:t>
             </a:r>
             <a:endParaRPr lang="en-US" sz="1500" dirty="0"/>
@@ -2187,7 +2187,7 @@
                   <a:srgbClr val="1A1A2E"/>
                 </a:solidFill>
               </a:rPr>
-              <a:t>Una recomendación formal de priorización entre Adventure, Indie y Casual
+              <a:t>A formal prioritisation recommendation between Adventure, Indie and Casual
 </a:t>
             </a:r>
             <a:endParaRPr lang="en-US" sz="1500" dirty="0"/>
@@ -2213,7 +2213,7 @@
                   <a:srgbClr val="1A1A2E"/>
                 </a:solidFill>
               </a:rPr>
-              <a:t>Las limitaciones consolidadas para el comité de inversión
+              <a:t>The consolidated limitations for the investment committee
 </a:t>
             </a:r>
             <a:endParaRPr lang="en-US" sz="1500" dirty="0"/>
@@ -2239,7 +2239,7 @@
                   <a:srgbClr val="1A1A2E"/>
                 </a:solidFill>
               </a:rPr>
-              <a:t>Los datos adicionales deseables antes de comprometer capital (p. ej. tamaño de estudio, presupuesto de marketing, cola larga &lt;500 reseñas)
+              <a:t>Desirable additional data before committing capital (e.g. studio size, marketing budget, the &lt;500-review long tail)
 </a:t>
             </a:r>
             <a:endParaRPr lang="en-US" sz="1500" dirty="0"/>
@@ -2311,7 +2311,7 @@
                 <a:ea typeface="Cambria" pitchFamily="34" charset="-122"/>
                 <a:cs typeface="Cambria" pitchFamily="34" charset="-120"/>
               </a:rPr>
-              <a:t>Anexo — Metodología y verificaciones</a:t>
+              <a:t>Appendix — Methodology and checks</a:t>
             </a:r>
             <a:endParaRPr lang="en-US" sz="2400" dirty="0"/>
           </a:p>
@@ -2347,7 +2347,7 @@
                   <a:srgbClr val="1A1A2E"/>
                 </a:solidFill>
               </a:rPr>
-              <a:t>Cuartiles de precio ajustado (base: 8.998 juegos de pago con ≥500 reseñas)
+              <a:t>Adjusted price quartiles (base: 8,998 paid games with ≥500 reviews)
 </a:t>
             </a:r>
             <a:endParaRPr lang="en-US" sz="1400" dirty="0"/>
@@ -2362,7 +2362,7 @@
                   <a:srgbClr val="6E7B91"/>
                 </a:solidFill>
               </a:rPr>
-              <a:t>Q1 ≤ 3,25 USD  ·  Q2 3,25–6,46  ·  Q3 6,46–12,36  ·  Q4 &gt; 12,36 USD
+              <a:t>Q1 ≤ $3.25  ·  Q2 $3.25-$6.46  ·  Q3 $6.46-$12.36  ·  Q4 &gt; $12.36
 </a:t>
             </a:r>
             <a:endParaRPr lang="en-US" sz="1400" dirty="0"/>
@@ -2377,7 +2377,7 @@
                   <a:srgbClr val="1A1A2E"/>
                 </a:solidFill>
               </a:rPr>
-              <a:t>Verificaciones aplicadas antes de aceptar el resultado
+              <a:t>Checks applied before accepting the result
 </a:t>
             </a:r>
             <a:endParaRPr lang="en-US" sz="1400" dirty="0"/>
@@ -2392,7 +2392,7 @@
                   <a:srgbClr val="1A1A2E"/>
                 </a:solidFill>
               </a:rPr>
-              <a:t>1. Prueba de sensatez: cuartiles ajustados vs. precio de lista bruto, mismo orden de magnitud.
+              <a:t>1. Sanity check: adjusted quartiles vs. raw unadjusted list price, same order of magnitude.
 </a:t>
             </a:r>
             <a:endParaRPr lang="en-US" sz="1400" dirty="0"/>
@@ -2407,7 +2407,7 @@
                   <a:srgbClr val="1A1A2E"/>
                 </a:solidFill>
               </a:rPr>
-              <a:t>2. Recálculo por vía alterna (pivot_table vs. groupby.agg) — coincide punto por punto.
+              <a:t>2. Recalculation via an alternate path (pivot_table vs. groupby.agg) — matches point for point.
 </a:t>
             </a:r>
             <a:endParaRPr lang="en-US" sz="1400" dirty="0"/>
@@ -2422,7 +2422,7 @@
                   <a:srgbClr val="1A1A2E"/>
                 </a:solidFill>
               </a:rPr>
-              <a:t>3. Antigüedad como confusor descartada: correlación ≈ −0,087.
+              <a:t>3. Age ruled out as a confounder: correlation ≈ -0.087.
 </a:t>
             </a:r>
             <a:endParaRPr lang="en-US" sz="1400" dirty="0"/>
@@ -2437,7 +2437,7 @@
                   <a:srgbClr val="1A1A2E"/>
                 </a:solidFill>
               </a:rPr>
-              <a:t>4. Control por banda de antigüedad (recientes vs. viejos): el patrón se sostiene.
+              <a:t>4. Control by age band (recent vs. older): the pattern holds.
 </a:t>
             </a:r>
             <a:endParaRPr lang="en-US" sz="1400" dirty="0"/>
@@ -2452,7 +2452,7 @@
                   <a:srgbClr val="1A1A2E"/>
                 </a:solidFill>
               </a:rPr>
-              <a:t>5. Efecto de tamaño cuantificado (2,50–5,04 p.p.), no solo dirección.
+              <a:t>5. Effect size quantified (2.50-5.04 p.p.), not just direction.
 </a:t>
             </a:r>
             <a:endParaRPr lang="en-US" sz="1400" dirty="0"/>
@@ -2467,7 +2467,7 @@
                   <a:srgbClr val="1A1A2E"/>
                 </a:solidFill>
               </a:rPr>
-              <a:t>6. Recálculo manual de % de reseñas positivas sobre muestra al azar — coincide exacto.
+              <a:t>6. Manual recalculation of % positive reviews on a random sample — matches exactly.
 </a:t>
             </a:r>
             <a:endParaRPr lang="en-US" sz="1400" dirty="0"/>
@@ -2482,7 +2482,7 @@
                   <a:srgbClr val="1A1A2E"/>
                 </a:solidFill>
               </a:rPr>
-              <a:t>7. Robustez de muestra revisada por género (n = 176 a 5.561); géneros con n&lt;350 marcados.</a:t>
+              <a:t>7. Sample robustness reviewed by genre (n = 176 to 5,561); genres with n&lt;350 flagged.</a:t>
             </a:r>
             <a:endParaRPr lang="en-US" sz="1400" dirty="0"/>
           </a:p>
@@ -2521,7 +2521,7 @@
                 <a:ea typeface="Calibri" pitchFamily="34" charset="-122"/>
                 <a:cs typeface="Calibri" pitchFamily="34" charset="-120"/>
               </a:rPr>
-              <a:t>Notebook técnico completo: notebooks/caso_steam_precio_recepcion.ipynb</a:t>
+              <a:t>Full technical notebook: notebooks/caso_steam_precio_recepcion.ipynb</a:t>
             </a:r>
             <a:endParaRPr lang="en-US" sz="900" dirty="0"/>
           </a:p>
@@ -2592,7 +2592,7 @@
                 <a:ea typeface="Cambria" pitchFamily="34" charset="-122"/>
                 <a:cs typeface="Cambria" pitchFamily="34" charset="-120"/>
               </a:rPr>
-              <a:t>Anexo — Preguntas y respuestas preparadas</a:t>
+              <a:t>Appendix — Prepared questions and answers</a:t>
             </a:r>
             <a:endParaRPr lang="en-US" sz="2200" dirty="0"/>
           </a:p>
@@ -2628,7 +2628,7 @@
                   <a:srgbClr val="1F5FA8"/>
                 </a:solidFill>
               </a:rPr>
-              <a:t>P: ¿No es esto solo que los juegos caros vienen de estudios más grandes con mejor marketing?</a:t>
+              <a:t>Q: Isn't this just that expensive games come from bigger studios with better marketing?</a:t>
             </a:r>
             <a:endParaRPr lang="en-US" sz="1250" dirty="0"/>
           </a:p>
@@ -2664,7 +2664,7 @@
                   <a:srgbClr val="1A1A2E"/>
                 </a:solidFill>
               </a:rPr>
-              <a:t>R: No lo descartamos: es la limitación de causalidad más importante del caso. El dataset no tiene tamaño de estudio ni presupuesto de marketing — se recomienda como dato adicional para la fase 6.</a:t>
+              <a:t>A: We don't rule it out: it's the case's most important causality limitation. The dataset has no studio size or marketing budget — recommended as additional data for Phase 6.</a:t>
             </a:r>
             <a:endParaRPr lang="en-US" sz="1150" dirty="0"/>
           </a:p>
@@ -2700,7 +2700,7 @@
                   <a:srgbClr val="1F5FA8"/>
                 </a:solidFill>
               </a:rPr>
-              <a:t>P: ¿Por qué excluir el 34% de juegos sin reseñas? ¿No se pierden oportunidades ahí?</a:t>
+              <a:t>Q: Why exclude the 34% of games with no reviews? Aren't opportunities lost there?</a:t>
             </a:r>
             <a:endParaRPr lang="en-US" sz="1250" dirty="0"/>
           </a:p>
@@ -2736,7 +2736,7 @@
                   <a:srgbClr val="1A1A2E"/>
                 </a:solidFill>
               </a:rPr>
-              <a:t>R: Se excluyen por confiabilidad estadística (con &lt;500 reseñas el % es ruido), no porque se descarte la oportunidad. Queda documentado como análisis adicional pendiente.</a:t>
+              <a:t>A: They are excluded for statistical reliability (with &lt;500 reviews the % is noise), not because the opportunity is dismissed. Documented as pending additional analysis.</a:t>
             </a:r>
             <a:endParaRPr lang="en-US" sz="1150" dirty="0"/>
           </a:p>
@@ -2772,7 +2772,7 @@
                   <a:srgbClr val="1F5FA8"/>
                 </a:solidFill>
               </a:rPr>
-              <a:t>P: ¿Qué tan sensible es el resultado a cómo definieron las franjas de precio?</a:t>
+              <a:t>Q: How sensitive is the result to how the price bands were defined?</a:t>
             </a:r>
             <a:endParaRPr lang="en-US" sz="1250" dirty="0"/>
           </a:p>
@@ -2808,7 +2808,7 @@
                   <a:srgbClr val="1A1A2E"/>
                 </a:solidFill>
               </a:rPr>
-              <a:t>R: Los cuartiles se recalcularon por vía alterna y se compararon contra el precio bruto sin ajustar — mismo orden de magnitud. Una prueba de sensibilidad con bandas fijas es un siguiente paso razonable.</a:t>
+              <a:t>A: The quartiles were recalculated via an alternate path and compared against raw unadjusted price — same order of magnitude. A sensitivity test with fixed bands is a reasonable next step.</a:t>
             </a:r>
             <a:endParaRPr lang="en-US" sz="1150" dirty="0"/>
           </a:p>
@@ -2844,7 +2844,7 @@
                   <a:srgbClr val="1F5FA8"/>
                 </a:solidFill>
               </a:rPr>
-              <a:t>P: ¿Por qué confiar en un dataset de terceros y no en datos directos de Valve?</a:t>
+              <a:t>Q: Why trust a third-party dataset instead of direct data from Valve?</a:t>
             </a:r>
             <a:endParaRPr lang="en-US" sz="1250" dirty="0"/>
           </a:p>
@@ -2880,7 +2880,7 @@
                   <a:srgbClr val="1A1A2E"/>
                 </a:solidFill>
               </a:rPr>
-              <a:t>R: Es una falla declarada en la evaluación ROCCC (falla parcial en "Original"). Se usa por ser la mejor fuente pública que junta precio, género y reseñas; `estimated_owners` no se usa como métrica principal por esta razón.</a:t>
+              <a:t>A: This is a declared failure in the ROCCC assessment (partial failure on "Original"). It's used as the best public source that combines price, genre and reviews; `estimated_owners` is not used as the main metric for this reason.</a:t>
             </a:r>
             <a:endParaRPr lang="en-US" sz="1150" dirty="0"/>
           </a:p>
@@ -2916,7 +2916,7 @@
                   <a:srgbClr val="1F5FA8"/>
                 </a:solidFill>
               </a:rPr>
-              <a:t>P: ¿Cuál es el número exacto detrás de "Adventure es el mejor candidato"?</a:t>
+              <a:t>Q: What's the exact number behind "Adventure is the best candidate"?</a:t>
             </a:r>
             <a:endParaRPr lang="en-US" sz="1250" dirty="0"/>
           </a:p>
@@ -2952,7 +2952,7 @@
                   <a:srgbClr val="1A1A2E"/>
                 </a:solidFill>
               </a:rPr>
-              <a:t>R: Adventure: 4.030 juegos, +5,04 p.p. de efecto, mediana máxima 87,48% en Q4. Todos los cálculos son reproducibles en el notebook técnico.</a:t>
+              <a:t>A: Adventure: 4,030 games, +5.04 p.p. effect, peak median 87.48% in Q4. All calculations are reproducible in the technical notebook.</a:t>
             </a:r>
             <a:endParaRPr lang="en-US" sz="1150" dirty="0"/>
           </a:p>
@@ -3023,7 +3023,7 @@
                 <a:ea typeface="Cambria" pitchFamily="34" charset="-122"/>
                 <a:cs typeface="Cambria" pitchFamily="34" charset="-120"/>
               </a:rPr>
-              <a:t>Gracias</a:t>
+              <a:t>Thank you</a:t>
             </a:r>
             <a:endParaRPr lang="en-US" sz="4000" dirty="0"/>
           </a:p>
@@ -3059,7 +3059,7 @@
                   <a:srgbClr val="CADCFC"/>
                 </a:solidFill>
               </a:rPr>
-              <a:t>Fuente: Steam Games Dataset (fronkongames, Kaggle, CC BY 4.0) + BLS CPI-U (dominio público).</a:t>
+              <a:t>Source: Steam Games Dataset (fronkongames, Kaggle, CC BY 4.0) + BLS CPI-U (public domain).</a:t>
             </a:r>
             <a:endParaRPr lang="en-US" sz="1400" dirty="0"/>
           </a:p>
@@ -3095,7 +3095,7 @@
                   <a:srgbClr val="A9BCE8"/>
                 </a:solidFill>
               </a:rPr>
-              <a:t>Caso de estudio de portafolio — Analista de Datos  ·  contacto: juanesa2002@gmail.com</a:t>
+              <a:t>Portfolio case study — Data Analyst  ·  contact: juanesa2002@gmail.com</a:t>
             </a:r>
             <a:endParaRPr lang="en-US" sz="1200" dirty="0"/>
           </a:p>
@@ -3166,7 +3166,7 @@
                 <a:ea typeface="Cambria" pitchFamily="34" charset="-122"/>
                 <a:cs typeface="Cambria" pitchFamily="34" charset="-120"/>
               </a:rPr>
-              <a:t>Contexto</a:t>
+              <a:t>Context</a:t>
             </a:r>
             <a:endParaRPr lang="en-US" sz="2800" dirty="0"/>
           </a:p>
@@ -3202,7 +3202,7 @@
                   <a:srgbClr val="1A1A2E"/>
                 </a:solidFill>
               </a:rPr>
-              <a:t>El problema de negocio
+              <a:t>The business problem
 </a:t>
             </a:r>
             <a:endParaRPr lang="en-US" sz="1600" dirty="0"/>
@@ -3217,7 +3217,7 @@
                   <a:srgbClr val="1A1A2E"/>
                 </a:solidFill>
               </a:rPr>
-              <a:t>Un fondo de inversión evalúa entrar al sector de videojuegos y no tiene un criterio basado en datos para decidir en qué género priorizar su tesis de inversión en el mercado de PC/Steam.
+              <a:t>An investment fund is evaluating entry into the video game sector and has no data-driven basis for deciding which genre to prioritise for its investment thesis in the PC/Steam market.
 </a:t>
             </a:r>
             <a:endParaRPr lang="en-US" sz="1600" dirty="0"/>
@@ -3232,7 +3232,7 @@
                   <a:srgbClr val="1A1A2E"/>
                 </a:solidFill>
               </a:rPr>
-              <a:t>La pregunta que respondemos
+              <a:t>The question we answer
 </a:t>
             </a:r>
             <a:endParaRPr lang="en-US" sz="1600" dirty="0"/>
@@ -3247,7 +3247,7 @@
                   <a:srgbClr val="1A1A2E"/>
                 </a:solidFill>
               </a:rPr>
-              <a:t>¿Qué combinaciones de género y franja de precio muestran el patrón más consistente de alta recepción (% de reseñas positivas), controlando por antigüedad del juego?
+              <a:t>Which genre and price-band combinations show the most consistent pattern of high reception (% positive reviews), controlling for game age?
 </a:t>
             </a:r>
             <a:endParaRPr lang="en-US" sz="1600" dirty="0"/>
@@ -3262,7 +3262,7 @@
                   <a:srgbClr val="1A1A2E"/>
                 </a:solidFill>
               </a:rPr>
-              <a:t>La decisión que habilita
+              <a:t>The decision this enables
 </a:t>
             </a:r>
             <a:endParaRPr lang="en-US" sz="1600" dirty="0"/>
@@ -3277,7 +3277,7 @@
                   <a:srgbClr val="1A1A2E"/>
                 </a:solidFill>
               </a:rPr>
-              <a:t>Recomendar 2-3 géneros donde el comité debería priorizar due diligence de inversión.</a:t>
+              <a:t>Recommend 2-3 genres where the committee should prioritise investment due diligence.</a:t>
             </a:r>
             <a:endParaRPr lang="en-US" sz="1600" dirty="0"/>
           </a:p>
@@ -3338,7 +3338,7 @@
                 <a:ea typeface="Cambria" pitchFamily="34" charset="-122"/>
                 <a:cs typeface="Cambria" pitchFamily="34" charset="-120"/>
               </a:rPr>
-              <a:t>117.430</a:t>
+              <a:t>117,430</a:t>
             </a:r>
             <a:endParaRPr lang="en-US" sz="4400" dirty="0"/>
           </a:p>
@@ -3374,7 +3374,7 @@
                   <a:srgbClr val="1A1A2E"/>
                 </a:solidFill>
               </a:rPr>
-              <a:t>juegos publicados en Steam analizados</a:t>
+              <a:t>games published on Steam analysed</a:t>
             </a:r>
             <a:endParaRPr lang="en-US" sz="1300" dirty="0"/>
           </a:p>
@@ -3449,7 +3449,7 @@
                   <a:srgbClr val="1A1A2E"/>
                 </a:solidFill>
               </a:rPr>
-              <a:t>géneros de videojuego reales evaluados</a:t>
+              <a:t>real video game genres evaluated</a:t>
             </a:r>
             <a:endParaRPr lang="en-US" sz="1300" dirty="0"/>
           </a:p>
@@ -3488,7 +3488,7 @@
                 <a:ea typeface="Cambria" pitchFamily="34" charset="-122"/>
                 <a:cs typeface="Cambria" pitchFamily="34" charset="-120"/>
               </a:rPr>
-              <a:t>8.998</a:t>
+              <a:t>8,998</a:t>
             </a:r>
             <a:endParaRPr lang="en-US" sz="4400" dirty="0"/>
           </a:p>
@@ -3524,7 +3524,7 @@
                   <a:srgbClr val="1A1A2E"/>
                 </a:solidFill>
               </a:rPr>
-              <a:t>juegos de pago con ≥500 reseñas (base de análisis)</a:t>
+              <a:t>paid games with ≥500 reviews (analysis base)</a:t>
             </a:r>
             <a:endParaRPr lang="en-US" sz="1300" dirty="0"/>
           </a:p>
@@ -3563,7 +3563,7 @@
                 <a:ea typeface="Calibri" pitchFamily="34" charset="-122"/>
                 <a:cs typeface="Calibri" pitchFamily="34" charset="-120"/>
               </a:rPr>
-              <a:t>Fuera de alcance: solo PC/Steam; no establece causalidad; no asigna presupuesto de inversión.</a:t>
+              <a:t>Out of scope: PC/Steam only; does not establish causality; does not allocate investment budget.</a:t>
             </a:r>
             <a:endParaRPr lang="en-US" sz="900" dirty="0"/>
           </a:p>
@@ -3634,7 +3634,7 @@
                 <a:ea typeface="Cambria" pitchFamily="34" charset="-122"/>
                 <a:cs typeface="Cambria" pitchFamily="34" charset="-120"/>
               </a:rPr>
-              <a:t>Método</a:t>
+              <a:t>Method</a:t>
             </a:r>
             <a:endParaRPr lang="en-US" sz="2800" dirty="0"/>
           </a:p>
@@ -3726,7 +3726,7 @@
                   <a:srgbClr val="1E2761"/>
                 </a:solidFill>
               </a:rPr>
-              <a:t>Fuentes</a:t>
+              <a:t>Sources</a:t>
             </a:r>
             <a:endParaRPr lang="en-US" sz="1500" dirty="0"/>
           </a:p>
@@ -3762,7 +3762,7 @@
                   <a:srgbClr val="1A1A2E"/>
                 </a:solidFill>
               </a:rPr>
-              <a:t>Steam Games Dataset (fronkongames, Kaggle, CC BY 4.0) + índice de inflación CPI-U (BLS, EE. UU.) para ajustar precios entre años.</a:t>
+              <a:t>Steam Games Dataset (fronkongames, Kaggle, CC BY 4.0) + CPI-U inflation index (BLS, US) to adjust prices across years.</a:t>
             </a:r>
             <a:endParaRPr lang="en-US" sz="1250" dirty="0"/>
           </a:p>
@@ -3854,7 +3854,7 @@
                   <a:srgbClr val="1E2761"/>
                 </a:solidFill>
               </a:rPr>
-              <a:t>Limpieza</a:t>
+              <a:t>Cleaning</a:t>
             </a:r>
             <a:endParaRPr lang="en-US" sz="1500" dirty="0"/>
           </a:p>
@@ -3890,7 +3890,7 @@
                   <a:srgbClr val="1A1A2E"/>
                 </a:solidFill>
               </a:rPr>
-              <a:t>Corrección de un bug de cabecera del CSV crudo, exclusión de duplicados y de 8.423 juegos sin género asignado. Reconciliación de conteos verificada con assert.</a:t>
+              <a:t>Fixed a header bug in the raw CSV, excluded duplicates and 8,423 games with no genre assigned. Count reconciliation verified with an assert.</a:t>
             </a:r>
             <a:endParaRPr lang="en-US" sz="1250" dirty="0"/>
           </a:p>
@@ -3982,7 +3982,7 @@
                   <a:srgbClr val="1E2761"/>
                 </a:solidFill>
               </a:rPr>
-              <a:t>Filtro de análisis</a:t>
+              <a:t>Analysis filter</a:t>
             </a:r>
             <a:endParaRPr lang="en-US" sz="1500" dirty="0"/>
           </a:p>
@@ -4018,7 +4018,7 @@
                   <a:srgbClr val="1A1A2E"/>
                 </a:solidFill>
               </a:rPr>
-              <a:t>Juegos de pago (Price &gt; 0) con ≥500 reseñas — el volumen mínimo para que el % de reseñas positivas sea estadísticamente confiable.</a:t>
+              <a:t>Paid games (Price &gt; 0) with ≥500 reviews — the minimum volume for the % positive reviews to be statistically reliable.</a:t>
             </a:r>
             <a:endParaRPr lang="en-US" sz="1250" dirty="0"/>
           </a:p>
@@ -4110,7 +4110,7 @@
                   <a:srgbClr val="1E2761"/>
                 </a:solidFill>
               </a:rPr>
-              <a:t>Franjas de precio</a:t>
+              <a:t>Price bands</a:t>
             </a:r>
             <a:endParaRPr lang="en-US" sz="1500" dirty="0"/>
           </a:p>
@@ -4146,7 +4146,7 @@
                   <a:srgbClr val="1A1A2E"/>
                 </a:solidFill>
               </a:rPr>
-              <a:t>Cuartiles de precio ajustado por inflación, calculados sobre los datos mismos (no bandas arbitrarias).</a:t>
+              <a:t>Inflation-adjusted price quartiles, calculated on the data itself (not arbitrary bands).</a:t>
             </a:r>
             <a:endParaRPr lang="en-US" sz="1250" dirty="0"/>
           </a:p>
@@ -4185,7 +4185,7 @@
                 <a:ea typeface="Calibri" pitchFamily="34" charset="-122"/>
                 <a:cs typeface="Calibri" pitchFamily="34" charset="-120"/>
               </a:rPr>
-              <a:t>Detalle completo y reproducible en notebooks/caso_steam_precio_recepcion.ipynb</a:t>
+              <a:t>Full, reproducible detail in notebooks/caso_steam_precio_recepcion.ipynb</a:t>
             </a:r>
             <a:endParaRPr lang="en-US" sz="900" dirty="0"/>
           </a:p>
@@ -4256,7 +4256,7 @@
                 <a:ea typeface="Calibri" pitchFamily="34" charset="-122"/>
                 <a:cs typeface="Calibri" pitchFamily="34" charset="-120"/>
               </a:rPr>
-              <a:t>Hallazgo 1</a:t>
+              <a:t>Finding 1</a:t>
             </a:r>
             <a:endParaRPr lang="en-US" sz="1300" dirty="0"/>
           </a:p>
@@ -4295,7 +4295,7 @@
                 <a:ea typeface="Cambria" pitchFamily="34" charset="-122"/>
                 <a:cs typeface="Cambria" pitchFamily="34" charset="-120"/>
               </a:rPr>
-              <a:t>La franja más barata es la de peor recepción, en los 10 géneros sin excepción</a:t>
+              <a:t>The cheapest band has the worst reception, across all 10 genres without exception</a:t>
             </a:r>
             <a:endParaRPr lang="en-US" sz="2200" dirty="0"/>
           </a:p>
@@ -4303,7 +4303,7 @@
       </p:sp>
       <p:pic>
         <p:nvPicPr>
-          <p:cNvPr id="4" name="Image 0" descr="/sessions/upbeat-brave-euler/mnt/Videojuegos/salidas/graficos/01_q1_vs_mejor_franja.png">    </p:cNvPr>
+          <p:cNvPr id="4" name="Image 0" descr="C:\Users\JUANES\Documents\Curriculum\Portafolio\Casos Estudio - Data Analyst\cases\steam-price-reception\salidas\graficos\01_q1_vs_mejor_franja.png">    </p:cNvPr>
           <p:cNvPicPr>
             <a:picLocks noChangeAspect="1"/>
           </p:cNvPicPr>
@@ -4376,7 +4376,7 @@
                   <a:srgbClr val="1A1A2E"/>
                 </a:solidFill>
               </a:rPr>
-              <a:t>En cada uno de los 10 géneros de juego reales, la franja de precio más económica (≤3,25 USD ajustados) obtiene la mediana de % de reseñas positivas más baja. La mejora al pasar a la mejor franja va de +2,5 a +5,0 puntos porcentuales.</a:t>
+              <a:t>In each of the 10 real game genres, the cheapest price band (≤$3.25 adjusted) gets the lowest median % of positive reviews. The improvement moving to the best band ranges from +2.5 to +5.0 percentage points.</a:t>
             </a:r>
             <a:endParaRPr lang="en-US" sz="1250" dirty="0"/>
           </a:p>
@@ -4415,7 +4415,7 @@
                 <a:ea typeface="Calibri" pitchFamily="34" charset="-122"/>
                 <a:cs typeface="Calibri" pitchFamily="34" charset="-120"/>
               </a:rPr>
-              <a:t>Fuente: Steam Games Dataset (fronkongames, CC BY 4.0) + BLS CPI-U.</a:t>
+              <a:t>Source: Steam Games Dataset (fronkongames, CC BY 4.0) + BLS CPI-U.</a:t>
             </a:r>
             <a:endParaRPr lang="en-US" sz="900" dirty="0"/>
           </a:p>
@@ -4486,7 +4486,7 @@
                 <a:ea typeface="Calibri" pitchFamily="34" charset="-122"/>
                 <a:cs typeface="Calibri" pitchFamily="34" charset="-120"/>
               </a:rPr>
-              <a:t>Hallazgo 2</a:t>
+              <a:t>Finding 2</a:t>
             </a:r>
             <a:endParaRPr lang="en-US" sz="1300" dirty="0"/>
           </a:p>
@@ -4525,7 +4525,7 @@
                 <a:ea typeface="Cambria" pitchFamily="34" charset="-122"/>
                 <a:cs typeface="Cambria" pitchFamily="34" charset="-120"/>
               </a:rPr>
-              <a:t>La mejor recepción se concentra en precios medios-altos, no en el extremo caro</a:t>
+              <a:t>The best reception clusters at mid-to-high prices, not at the expensive extreme</a:t>
             </a:r>
             <a:endParaRPr lang="en-US" sz="2200" dirty="0"/>
           </a:p>
@@ -4533,7 +4533,7 @@
       </p:sp>
       <p:pic>
         <p:nvPicPr>
-          <p:cNvPr id="4" name="Image 0" descr="/sessions/upbeat-brave-euler/mnt/Videojuegos/salidas/graficos/02_heatmap_genero_franja.png">    </p:cNvPr>
+          <p:cNvPr id="4" name="Image 0" descr="C:\Users\JUANES\Documents\Curriculum\Portafolio\Casos Estudio - Data Analyst\cases\steam-price-reception\salidas\graficos\02_heatmap_genero_franja.png">    </p:cNvPr>
           <p:cNvPicPr>
             <a:picLocks noChangeAspect="1"/>
           </p:cNvPicPr>
@@ -4606,7 +4606,7 @@
                   <a:srgbClr val="1A1A2E"/>
                 </a:solidFill>
               </a:rPr>
-              <a:t>El mapa de calor muestra que el pico de recepción está en Q3 (6,46–12,36 USD) o Q4, según el género — nunca en Q1 o Q2. No hay una relación lineal simple de "más caro siempre mejor".</a:t>
+              <a:t>The heatmap shows the reception peak is at Q3 ($6.46-$12.36) or Q4, depending on genre — never Q1 or Q2. There is no simple linear "more expensive is always better" relationship.</a:t>
             </a:r>
             <a:endParaRPr lang="en-US" sz="1250" dirty="0"/>
           </a:p>
@@ -4645,7 +4645,7 @@
                 <a:ea typeface="Calibri" pitchFamily="34" charset="-122"/>
                 <a:cs typeface="Calibri" pitchFamily="34" charset="-120"/>
               </a:rPr>
-              <a:t>Fuente: Steam Games Dataset (fronkongames, CC BY 4.0) + BLS CPI-U.</a:t>
+              <a:t>Source: Steam Games Dataset (fronkongames, CC BY 4.0) + BLS CPI-U.</a:t>
             </a:r>
             <a:endParaRPr lang="en-US" sz="900" dirty="0"/>
           </a:p>
@@ -4716,7 +4716,7 @@
                 <a:ea typeface="Calibri" pitchFamily="34" charset="-122"/>
                 <a:cs typeface="Calibri" pitchFamily="34" charset="-120"/>
               </a:rPr>
-              <a:t>Hallazgo 3</a:t>
+              <a:t>Finding 3</a:t>
             </a:r>
             <a:endParaRPr lang="en-US" sz="1300" dirty="0"/>
           </a:p>
@@ -4755,7 +4755,7 @@
                 <a:ea typeface="Cambria" pitchFamily="34" charset="-122"/>
                 <a:cs typeface="Cambria" pitchFamily="34" charset="-120"/>
               </a:rPr>
-              <a:t>Adventure, Indie y Casual: los candidatos con mejor evidencia combinada</a:t>
+              <a:t>Adventure, Indie and Casual: the candidates with the best combined evidence</a:t>
             </a:r>
             <a:endParaRPr lang="en-US" sz="2200" dirty="0"/>
           </a:p>
@@ -4763,7 +4763,7 @@
       </p:sp>
       <p:pic>
         <p:nvPicPr>
-          <p:cNvPr id="4" name="Image 0" descr="/sessions/upbeat-brave-euler/mnt/Videojuegos/salidas/graficos/03_ranking_efecto_candidatos.png">    </p:cNvPr>
+          <p:cNvPr id="4" name="Image 0" descr="C:\Users\JUANES\Documents\Curriculum\Portafolio\Casos Estudio - Data Analyst\cases\steam-price-reception\salidas\graficos\03_ranking_efecto_candidatos.png">    </p:cNvPr>
           <p:cNvPicPr>
             <a:picLocks noChangeAspect="1"/>
           </p:cNvPicPr>
@@ -4836,7 +4836,7 @@
                   <a:srgbClr val="1A1A2E"/>
                 </a:solidFill>
               </a:rPr>
-              <a:t>Al ordenar los géneros por el tamaño del efecto (diferencia entre Q1 y su mejor franja), Adventure lidera con +5,04 p.p. Junto con Indie (+3,94 p.p., mayor volumen: 5.561 juegos) y Casual (+3,31 p.p., mayor recepción absoluta: 89,6%), combinan la evidencia más sólida.</a:t>
+              <a:t>Ranking genres by effect size (the difference between Q1 and its best band), Adventure leads with +5.04 p.p. Together with Indie (+3.94 p.p., largest volume: 5,561 games) and Casual (+3.31 p.p., highest absolute reception: 89.6%), they combine the strongest evidence.</a:t>
             </a:r>
             <a:endParaRPr lang="en-US" sz="1250" dirty="0"/>
           </a:p>
@@ -4875,7 +4875,7 @@
                 <a:ea typeface="Calibri" pitchFamily="34" charset="-122"/>
                 <a:cs typeface="Calibri" pitchFamily="34" charset="-120"/>
               </a:rPr>
-              <a:t>Fuente: Steam Games Dataset (fronkongames, CC BY 4.0) + BLS CPI-U.</a:t>
+              <a:t>Source: Steam Games Dataset (fronkongames, CC BY 4.0) + BLS CPI-U.</a:t>
             </a:r>
             <a:endParaRPr lang="en-US" sz="900" dirty="0"/>
           </a:p>
@@ -4946,7 +4946,7 @@
                 <a:ea typeface="Calibri" pitchFamily="34" charset="-122"/>
                 <a:cs typeface="Calibri" pitchFamily="34" charset="-120"/>
               </a:rPr>
-              <a:t>Hallazgo 4</a:t>
+              <a:t>Finding 4</a:t>
             </a:r>
             <a:endParaRPr lang="en-US" sz="1300" dirty="0"/>
           </a:p>
@@ -4985,7 +4985,7 @@
                 <a:ea typeface="Cambria" pitchFamily="34" charset="-122"/>
                 <a:cs typeface="Cambria" pitchFamily="34" charset="-120"/>
               </a:rPr>
-              <a:t>El patrón no es un artefacto de la antigüedad del juego</a:t>
+              <a:t>The pattern is not an artefact of the game's age</a:t>
             </a:r>
             <a:endParaRPr lang="en-US" sz="2200" dirty="0"/>
           </a:p>
@@ -4993,7 +4993,7 @@
       </p:sp>
       <p:pic>
         <p:nvPicPr>
-          <p:cNvPr id="4" name="Image 0" descr="/sessions/upbeat-brave-euler/mnt/Videojuegos/salidas/graficos/04_control_antiguedad.png">    </p:cNvPr>
+          <p:cNvPr id="4" name="Image 0" descr="C:\Users\JUANES\Documents\Curriculum\Portafolio\Casos Estudio - Data Analyst\cases\steam-price-reception\salidas\graficos\04_control_antiguedad.png">    </p:cNvPr>
           <p:cNvPicPr>
             <a:picLocks noChangeAspect="1"/>
           </p:cNvPicPr>
@@ -5066,7 +5066,7 @@
                   <a:srgbClr val="1A1A2E"/>
                 </a:solidFill>
               </a:rPr>
-              <a:t>Separamos juegos recientes de juegos más antiguos: en los cuatro géneros de referencia, Q1 sigue siendo la franja más débil en ambos grupos. La correlación entre antigüedad y % de reseñas positivas es de apenas −0,087.</a:t>
+              <a:t>We split recent games from older ones: across the four reference genres, Q1 remains the weakest band in both groups. The correlation between age and % positive reviews is just -0.087.</a:t>
             </a:r>
             <a:endParaRPr lang="en-US" sz="1250" dirty="0"/>
           </a:p>
@@ -5105,7 +5105,7 @@
                 <a:ea typeface="Calibri" pitchFamily="34" charset="-122"/>
                 <a:cs typeface="Calibri" pitchFamily="34" charset="-120"/>
               </a:rPr>
-              <a:t>Fuente: Steam Games Dataset (fronkongames, CC BY 4.0) + BLS CPI-U.</a:t>
+              <a:t>Source: Steam Games Dataset (fronkongames, CC BY 4.0) + BLS CPI-U.</a:t>
             </a:r>
             <a:endParaRPr lang="en-US" sz="900" dirty="0"/>
           </a:p>
@@ -5176,7 +5176,7 @@
                 <a:ea typeface="Cambria" pitchFamily="34" charset="-122"/>
                 <a:cs typeface="Cambria" pitchFamily="34" charset="-120"/>
               </a:rPr>
-              <a:t>Candidatos con mejor evidencia para due diligence</a:t>
+              <a:t>Candidates with the best evidence for due diligence</a:t>
             </a:r>
             <a:endParaRPr lang="en-US" sz="2600" dirty="0"/>
           </a:p>
@@ -5276,7 +5276,7 @@
                 <a:ea typeface="Cambria" pitchFamily="34" charset="-122"/>
                 <a:cs typeface="Cambria" pitchFamily="34" charset="-120"/>
               </a:rPr>
-              <a:t>+5,04 p.p.</a:t>
+              <a:t>+5.04 p.p.</a:t>
             </a:r>
             <a:endParaRPr lang="en-US" sz="4000" dirty="0"/>
           </a:p>
@@ -5312,7 +5312,7 @@
                   <a:srgbClr val="CADCFC"/>
                 </a:solidFill>
               </a:rPr>
-              <a:t>mayor efecto de precio sobre recepción</a:t>
+              <a:t>largest price effect on reception</a:t>
             </a:r>
             <a:endParaRPr lang="en-US" sz="1350" dirty="0"/>
           </a:p>
@@ -5348,7 +5348,7 @@
                   <a:srgbClr val="A9BCE8"/>
                 </a:solidFill>
               </a:rPr>
-              <a:t>4.030 juegos de evidencia</a:t>
+              <a:t>4,030 games of evidence</a:t>
             </a:r>
             <a:endParaRPr lang="en-US" sz="1200" dirty="0"/>
           </a:p>
@@ -5448,7 +5448,7 @@
                 <a:ea typeface="Cambria" pitchFamily="34" charset="-122"/>
                 <a:cs typeface="Cambria" pitchFamily="34" charset="-120"/>
               </a:rPr>
-              <a:t>5.561</a:t>
+              <a:t>5,561</a:t>
             </a:r>
             <a:endParaRPr lang="en-US" sz="4000" dirty="0"/>
           </a:p>
@@ -5484,7 +5484,7 @@
                   <a:srgbClr val="CADCFC"/>
                 </a:solidFill>
               </a:rPr>
-              <a:t>juegos — el mayor volumen de evidencia</a:t>
+              <a:t>games — the largest volume of evidence</a:t>
             </a:r>
             <a:endParaRPr lang="en-US" sz="1350" dirty="0"/>
           </a:p>
@@ -5520,7 +5520,7 @@
                   <a:srgbClr val="A9BCE8"/>
                 </a:solidFill>
               </a:rPr>
-              <a:t>+3,94 p.p. de efecto</a:t>
+              <a:t>+3.94 p.p. effect</a:t>
             </a:r>
             <a:endParaRPr lang="en-US" sz="1200" dirty="0"/>
           </a:p>
@@ -5620,7 +5620,7 @@
                 <a:ea typeface="Cambria" pitchFamily="34" charset="-122"/>
                 <a:cs typeface="Cambria" pitchFamily="34" charset="-120"/>
               </a:rPr>
-              <a:t>89,6%</a:t>
+              <a:t>89.6%</a:t>
             </a:r>
             <a:endParaRPr lang="en-US" sz="4000" dirty="0"/>
           </a:p>
@@ -5656,7 +5656,7 @@
                   <a:srgbClr val="CADCFC"/>
                 </a:solidFill>
               </a:rPr>
-              <a:t>la recepción absoluta más alta de los 10 géneros</a:t>
+              <a:t>the highest absolute reception of the 10 genres</a:t>
             </a:r>
             <a:endParaRPr lang="en-US" sz="1350" dirty="0"/>
           </a:p>
@@ -5692,7 +5692,7 @@
                   <a:srgbClr val="A9BCE8"/>
                 </a:solidFill>
               </a:rPr>
-              <a:t>+3,31 p.p. de efecto</a:t>
+              <a:t>+3.31 p.p. effect</a:t>
             </a:r>
             <a:endParaRPr lang="en-US" sz="1200" dirty="0"/>
           </a:p>
@@ -5731,7 +5731,7 @@
                 <a:ea typeface="Calibri" pitchFamily="34" charset="-122"/>
                 <a:cs typeface="Calibri" pitchFamily="34" charset="-120"/>
               </a:rPr>
-              <a:t>Massively Multiplayer queda fuera de esta lista: evidencia insuficiente (176 juegos) y peor recepción en las 4 franjas.</a:t>
+              <a:t>Massively Multiplayer is left off this list: insufficient evidence (176 games) and worst reception across all 4 bands.</a:t>
             </a:r>
             <a:endParaRPr lang="en-US" sz="900" dirty="0"/>
           </a:p>
@@ -5802,7 +5802,7 @@
                 <a:ea typeface="Cambria" pitchFamily="34" charset="-122"/>
                 <a:cs typeface="Cambria" pitchFamily="34" charset="-120"/>
               </a:rPr>
-              <a:t>Qué no responde este análisis</a:t>
+              <a:t>What this analysis doesn't answer</a:t>
             </a:r>
             <a:endParaRPr lang="en-US" sz="2800" dirty="0"/>
           </a:p>
@@ -5860,7 +5860,7 @@
                   <a:srgbClr val="1F5FA8"/>
                 </a:solidFill>
               </a:rPr>
-              <a:t>Causalidad</a:t>
+              <a:t>Causality</a:t>
             </a:r>
             <a:endParaRPr lang="en-US" sz="1500" dirty="0"/>
           </a:p>
@@ -5896,7 +5896,7 @@
                   <a:srgbClr val="1A1A2E"/>
                 </a:solidFill>
               </a:rPr>
-              <a:t>El patrón es una correlación descriptiva. Puede reflejar selección (estudios que cobran más también invierten más en calidad), no que subir el precio mejore la recepción.</a:t>
+              <a:t>The pattern is a descriptive correlation. It may reflect selection (studios who charge more also invest more in quality), not that raising the price improves reception.</a:t>
             </a:r>
             <a:endParaRPr lang="en-US" sz="1250" dirty="0"/>
           </a:p>
@@ -5954,7 +5954,7 @@
                   <a:srgbClr val="1F5FA8"/>
                 </a:solidFill>
               </a:rPr>
-              <a:t>Cola larga</a:t>
+              <a:t>Long tail</a:t>
             </a:r>
             <a:endParaRPr lang="en-US" sz="1500" dirty="0"/>
           </a:p>
@@ -5990,7 +5990,7 @@
                   <a:srgbClr val="1A1A2E"/>
                 </a:solidFill>
               </a:rPr>
-              <a:t>34,1% del catálogo no tiene ninguna reseña y queda fuera del análisis por confiabilidad estadística — no porque se haya descartado como oportunidad.</a:t>
+              <a:t>34.1% of the catalogue has no reviews and is excluded from the analysis for statistical reliability — not because the opportunity was dismissed.</a:t>
             </a:r>
             <a:endParaRPr lang="en-US" sz="1250" dirty="0"/>
           </a:p>
@@ -6048,7 +6048,7 @@
                   <a:srgbClr val="1F5FA8"/>
                 </a:solidFill>
               </a:rPr>
-              <a:t>Evolución en el tiempo</a:t>
+              <a:t>Evolution over time</a:t>
             </a:r>
             <a:endParaRPr lang="en-US" sz="1500" dirty="0"/>
           </a:p>
@@ -6084,7 +6084,7 @@
                   <a:srgbClr val="1A1A2E"/>
                 </a:solidFill>
               </a:rPr>
-              <a:t>No hay reseñas fechadas individuales; se usa la antigüedad del juego como proxy, no la evolución real de la recepción.</a:t>
+              <a:t>There are no dated individual reviews; game age is used as a proxy, not the real evolution of reception.</a:t>
             </a:r>
             <a:endParaRPr lang="en-US" sz="1250" dirty="0"/>
           </a:p>
@@ -6142,7 +6142,7 @@
                   <a:srgbClr val="1F5FA8"/>
                 </a:solidFill>
               </a:rPr>
-              <a:t>Alcance de la recomendación</a:t>
+              <a:t>Scope of the recommendation</a:t>
             </a:r>
             <a:endParaRPr lang="en-US" sz="1500" dirty="0"/>
           </a:p>
@@ -6178,7 +6178,7 @@
                   <a:srgbClr val="1A1A2E"/>
                 </a:solidFill>
               </a:rPr>
-              <a:t>Prioriza géneros, no asigna presupuesto ni reemplaza el due diligence específico de cada estudio o publisher.</a:t>
+              <a:t>Prioritises genres, doesn't allocate budget or replace studio-or-publisher-specific due diligence.</a:t>
             </a:r>
             <a:endParaRPr lang="en-US" sz="1250" dirty="0"/>
           </a:p>
